--- a/이용매뉴얼/관리자-이용매뉴얼.pptx
+++ b/이용매뉴얼/관리자-이용매뉴얼.pptx
@@ -5162,7 +5162,7 @@
                 </a:solidFill>
                 <a:latin typeface="맑은 고딕"/>
               </a:rPr>
-              <a:t>급여대장 CSV → 귀속월(일한 달) 집계. 장부급여 = 실지급액 − 지출결의</a:t>
+              <a:t>급여대장 CSV → 귀속월(일한 달) 집계. 실제 지급총액 = 급여 실지급액 + 지출결의 / 장부 급여분은 실지급 − 지출결의로 기록(지결행과 중복방지)</a:t>
             </a:r>
           </a:p>
           <a:p>
